--- a/outputs/발표자료.pptx
+++ b/outputs/발표자료.pptx
@@ -3715,7 +3715,7 @@
               <a:defRPr sz="1300"/>
             </a:pPr>
             <a:r>
-              <a:t>· 추론 5.29초 (336시간 배치)</a:t>
+              <a:t>· 추론 7.43초 (336시간 배치)</a:t>
             </a:r>
           </a:p>
           <a:p>

--- a/outputs/발표자료.pptx
+++ b/outputs/발표자료.pptx
@@ -3715,7 +3715,7 @@
               <a:defRPr sz="1300"/>
             </a:pPr>
             <a:r>
-              <a:t>· 추론 7.43초 (336시간 배치)</a:t>
+              <a:t>· 추론 4.33초 (336시간 배치)</a:t>
             </a:r>
           </a:p>
           <a:p>
